--- a/.lessons/29 Fundamental Authorization ( Yalnız öz yazısını silə bilər A sayılır )/5 Authorization - Role/1.pptx
+++ b/.lessons/29 Fundamental Authorization ( Yalnız öz yazısını silə bilər A sayılır )/5 Authorization - Role/1.pptx
@@ -8,6 +8,12 @@
     <p:sldId id="402" r:id="rId2"/>
     <p:sldId id="403" r:id="rId3"/>
     <p:sldId id="400" r:id="rId4"/>
+    <p:sldId id="404" r:id="rId5"/>
+    <p:sldId id="405" r:id="rId6"/>
+    <p:sldId id="406" r:id="rId7"/>
+    <p:sldId id="407" r:id="rId8"/>
+    <p:sldId id="408" r:id="rId9"/>
+    <p:sldId id="409" r:id="rId10"/>
   </p:sldIdLst>
   <p:sldSz cx="12192000" cy="6858000"/>
   <p:notesSz cx="6858000" cy="9144000"/>
@@ -261,7 +267,7 @@
           <a:p>
             <a:fld id="{3E102D2E-813C-461C-9963-687A650C48C0}" type="datetimeFigureOut">
               <a:rPr lang="en-US" smtClean="0"/>
-              <a:t>5/23/2025</a:t>
+              <a:t>6/3/2025</a:t>
             </a:fld>
             <a:endParaRPr lang="en-US"/>
           </a:p>
@@ -459,7 +465,7 @@
           <a:p>
             <a:fld id="{3E102D2E-813C-461C-9963-687A650C48C0}" type="datetimeFigureOut">
               <a:rPr lang="en-US" smtClean="0"/>
-              <a:t>5/23/2025</a:t>
+              <a:t>6/3/2025</a:t>
             </a:fld>
             <a:endParaRPr lang="en-US"/>
           </a:p>
@@ -667,7 +673,7 @@
           <a:p>
             <a:fld id="{3E102D2E-813C-461C-9963-687A650C48C0}" type="datetimeFigureOut">
               <a:rPr lang="en-US" smtClean="0"/>
-              <a:t>5/23/2025</a:t>
+              <a:t>6/3/2025</a:t>
             </a:fld>
             <a:endParaRPr lang="en-US"/>
           </a:p>
@@ -865,7 +871,7 @@
           <a:p>
             <a:fld id="{3E102D2E-813C-461C-9963-687A650C48C0}" type="datetimeFigureOut">
               <a:rPr lang="en-US" smtClean="0"/>
-              <a:t>5/23/2025</a:t>
+              <a:t>6/3/2025</a:t>
             </a:fld>
             <a:endParaRPr lang="en-US"/>
           </a:p>
@@ -1140,7 +1146,7 @@
           <a:p>
             <a:fld id="{3E102D2E-813C-461C-9963-687A650C48C0}" type="datetimeFigureOut">
               <a:rPr lang="en-US" smtClean="0"/>
-              <a:t>5/23/2025</a:t>
+              <a:t>6/3/2025</a:t>
             </a:fld>
             <a:endParaRPr lang="en-US"/>
           </a:p>
@@ -1405,7 +1411,7 @@
           <a:p>
             <a:fld id="{3E102D2E-813C-461C-9963-687A650C48C0}" type="datetimeFigureOut">
               <a:rPr lang="en-US" smtClean="0"/>
-              <a:t>5/23/2025</a:t>
+              <a:t>6/3/2025</a:t>
             </a:fld>
             <a:endParaRPr lang="en-US"/>
           </a:p>
@@ -1817,7 +1823,7 @@
           <a:p>
             <a:fld id="{3E102D2E-813C-461C-9963-687A650C48C0}" type="datetimeFigureOut">
               <a:rPr lang="en-US" smtClean="0"/>
-              <a:t>5/23/2025</a:t>
+              <a:t>6/3/2025</a:t>
             </a:fld>
             <a:endParaRPr lang="en-US"/>
           </a:p>
@@ -1958,7 +1964,7 @@
           <a:p>
             <a:fld id="{3E102D2E-813C-461C-9963-687A650C48C0}" type="datetimeFigureOut">
               <a:rPr lang="en-US" smtClean="0"/>
-              <a:t>5/23/2025</a:t>
+              <a:t>6/3/2025</a:t>
             </a:fld>
             <a:endParaRPr lang="en-US"/>
           </a:p>
@@ -2071,7 +2077,7 @@
           <a:p>
             <a:fld id="{3E102D2E-813C-461C-9963-687A650C48C0}" type="datetimeFigureOut">
               <a:rPr lang="en-US" smtClean="0"/>
-              <a:t>5/23/2025</a:t>
+              <a:t>6/3/2025</a:t>
             </a:fld>
             <a:endParaRPr lang="en-US"/>
           </a:p>
@@ -2382,7 +2388,7 @@
           <a:p>
             <a:fld id="{3E102D2E-813C-461C-9963-687A650C48C0}" type="datetimeFigureOut">
               <a:rPr lang="en-US" smtClean="0"/>
-              <a:t>5/23/2025</a:t>
+              <a:t>6/3/2025</a:t>
             </a:fld>
             <a:endParaRPr lang="en-US"/>
           </a:p>
@@ -2670,7 +2676,7 @@
           <a:p>
             <a:fld id="{3E102D2E-813C-461C-9963-687A650C48C0}" type="datetimeFigureOut">
               <a:rPr lang="en-US" smtClean="0"/>
-              <a:t>5/23/2025</a:t>
+              <a:t>6/3/2025</a:t>
             </a:fld>
             <a:endParaRPr lang="en-US"/>
           </a:p>
@@ -2911,7 +2917,7 @@
           <a:p>
             <a:fld id="{3E102D2E-813C-461C-9963-687A650C48C0}" type="datetimeFigureOut">
               <a:rPr lang="en-US" smtClean="0"/>
-              <a:t>5/23/2025</a:t>
+              <a:t>6/3/2025</a:t>
             </a:fld>
             <a:endParaRPr lang="en-US"/>
           </a:p>
@@ -3349,7 +3355,7 @@
         <p:spPr>
           <a:xfrm>
             <a:off x="217714" y="255046"/>
-            <a:ext cx="11756571" cy="355354"/>
+            <a:ext cx="11756571" cy="955518"/>
           </a:xfrm>
           <a:prstGeom prst="rect">
             <a:avLst/>
@@ -3369,21 +3375,122 @@
               <a:buNone/>
             </a:pPr>
             <a:r>
-              <a:rPr kumimoji="0" lang="en-US" altLang="en-US" sz="1300" b="0" i="0" u="none" strike="noStrike" cap="none" normalizeH="0" baseline="0">
-                <a:ln>
-                  <a:noFill/>
-                </a:ln>
-                <a:solidFill>
-                  <a:schemeClr val="tx1"/>
-                </a:solidFill>
-                <a:effectLst/>
-                <a:latin typeface="Arial" panose="020B0604020202020204" pitchFamily="34" charset="0"/>
-              </a:rPr>
-              <a:t>.</a:t>
-            </a:r>
-          </a:p>
-        </p:txBody>
-      </p:sp>
+              <a:rPr lang="az-Latn-AZ" altLang="en-US" sz="1300">
+                <a:latin typeface="Arial" panose="020B0604020202020204" pitchFamily="34" charset="0"/>
+              </a:rPr>
+              <a:t>Bu dərsimiz `</a:t>
+            </a:r>
+            <a:r>
+              <a:rPr lang="az-Latn-AZ" altLang="en-US" sz="1300" b="1">
+                <a:latin typeface="Arial" panose="020B0604020202020204" pitchFamily="34" charset="0"/>
+              </a:rPr>
+              <a:t>Authorization - Role</a:t>
+            </a:r>
+            <a:r>
+              <a:rPr lang="az-Latn-AZ" altLang="en-US" sz="1300">
+                <a:latin typeface="Arial" panose="020B0604020202020204" pitchFamily="34" charset="0"/>
+              </a:rPr>
+              <a:t>` haqqında olacaq. Bunun üçün ilk öncə </a:t>
+            </a:r>
+            <a:r>
+              <a:rPr lang="az-Latn-AZ" altLang="en-US" sz="1300" b="1">
+                <a:latin typeface="Arial" panose="020B0604020202020204" pitchFamily="34" charset="0"/>
+              </a:rPr>
+              <a:t>ROLE</a:t>
+            </a:r>
+            <a:r>
+              <a:rPr lang="az-Latn-AZ" altLang="en-US" sz="1300">
+                <a:latin typeface="Arial" panose="020B0604020202020204" pitchFamily="34" charset="0"/>
+              </a:rPr>
+              <a:t> adında bir model və onun </a:t>
+            </a:r>
+            <a:r>
+              <a:rPr lang="az-Latn-AZ" altLang="en-US" sz="1300" b="1">
+                <a:latin typeface="Arial" panose="020B0604020202020204" pitchFamily="34" charset="0"/>
+              </a:rPr>
+              <a:t>migration</a:t>
+            </a:r>
+            <a:r>
+              <a:rPr lang="az-Latn-AZ" altLang="en-US" sz="1300">
+                <a:latin typeface="Arial" panose="020B0604020202020204" pitchFamily="34" charset="0"/>
+              </a:rPr>
+              <a:t> -nını yaradırıq. </a:t>
+            </a:r>
+          </a:p>
+          <a:p>
+            <a:pPr>
+              <a:lnSpc>
+                <a:spcPct val="150000"/>
+              </a:lnSpc>
+              <a:buNone/>
+            </a:pPr>
+            <a:endParaRPr kumimoji="0" lang="az-Latn-AZ" altLang="en-US" sz="1300" b="0" i="0" u="none" strike="noStrike" cap="none" normalizeH="0" baseline="0">
+              <a:ln>
+                <a:noFill/>
+              </a:ln>
+              <a:solidFill>
+                <a:schemeClr val="tx1"/>
+              </a:solidFill>
+              <a:effectLst/>
+              <a:latin typeface="Arial" panose="020B0604020202020204" pitchFamily="34" charset="0"/>
+            </a:endParaRPr>
+          </a:p>
+          <a:p>
+            <a:pPr>
+              <a:lnSpc>
+                <a:spcPct val="150000"/>
+              </a:lnSpc>
+              <a:buNone/>
+            </a:pPr>
+            <a:r>
+              <a:rPr lang="az-Latn-AZ" altLang="en-US" sz="1300">
+                <a:latin typeface="Arial" panose="020B0604020202020204" pitchFamily="34" charset="0"/>
+              </a:rPr>
+              <a:t>İzahı sonra edəcəm.....</a:t>
+            </a:r>
+            <a:endParaRPr kumimoji="0" lang="en-US" altLang="en-US" sz="1300" b="0" i="0" u="none" strike="noStrike" cap="none" normalizeH="0" baseline="0">
+              <a:ln>
+                <a:noFill/>
+              </a:ln>
+              <a:solidFill>
+                <a:schemeClr val="tx1"/>
+              </a:solidFill>
+              <a:effectLst/>
+              <a:latin typeface="Arial" panose="020B0604020202020204" pitchFamily="34" charset="0"/>
+            </a:endParaRPr>
+          </a:p>
+        </p:txBody>
+      </p:sp>
+      <p:pic>
+        <p:nvPicPr>
+          <p:cNvPr id="4" name="Picture 3">
+            <a:extLst>
+              <a:ext uri="{FF2B5EF4-FFF2-40B4-BE49-F238E27FC236}">
+                <a16:creationId xmlns:a16="http://schemas.microsoft.com/office/drawing/2014/main" id="{843E1F3B-97B9-1E91-4EE0-029A280E6819}"/>
+              </a:ext>
+            </a:extLst>
+          </p:cNvPr>
+          <p:cNvPicPr>
+            <a:picLocks noChangeAspect="1"/>
+          </p:cNvPicPr>
+          <p:nvPr/>
+        </p:nvPicPr>
+        <p:blipFill>
+          <a:blip r:embed="rId2"/>
+          <a:stretch>
+            <a:fillRect/>
+          </a:stretch>
+        </p:blipFill>
+        <p:spPr>
+          <a:xfrm>
+            <a:off x="2579934" y="4295417"/>
+            <a:ext cx="9612066" cy="2562583"/>
+          </a:xfrm>
+          <a:prstGeom prst="rect">
+            <a:avLst/>
+          </a:prstGeom>
+        </p:spPr>
+      </p:pic>
     </p:spTree>
     <p:extLst>
       <p:ext uri="{BB962C8B-B14F-4D97-AF65-F5344CB8AC3E}">
@@ -3435,7 +3542,7 @@
         <p:spPr>
           <a:xfrm>
             <a:off x="217714" y="255046"/>
-            <a:ext cx="11756571" cy="355354"/>
+            <a:ext cx="11756571" cy="3056093"/>
           </a:xfrm>
           <a:prstGeom prst="rect">
             <a:avLst/>
@@ -3455,7 +3562,7 @@
               <a:buNone/>
             </a:pPr>
             <a:r>
-              <a:rPr kumimoji="0" lang="en-US" altLang="en-US" sz="1300" b="0" i="0" u="none" strike="noStrike" cap="none" normalizeH="0" baseline="0">
+              <a:rPr kumimoji="0" lang="az-Latn-AZ" altLang="en-US" sz="1300" b="1" i="0" u="none" strike="noStrike" cap="none" normalizeH="0" baseline="0">
                 <a:ln>
                   <a:noFill/>
                 </a:ln>
@@ -3465,11 +3572,334 @@
                 <a:effectLst/>
                 <a:latin typeface="Arial" panose="020B0604020202020204" pitchFamily="34" charset="0"/>
               </a:rPr>
-              <a:t>.</a:t>
-            </a:r>
-          </a:p>
-        </p:txBody>
-      </p:sp>
+              <a:t>ROLE</a:t>
+            </a:r>
+            <a:r>
+              <a:rPr kumimoji="0" lang="az-Latn-AZ" altLang="en-US" sz="1300" b="0" i="0" u="none" strike="noStrike" cap="none" normalizeH="0" baseline="0">
+                <a:ln>
+                  <a:noFill/>
+                </a:ln>
+                <a:solidFill>
+                  <a:schemeClr val="tx1"/>
+                </a:solidFill>
+                <a:effectLst/>
+                <a:latin typeface="Arial" panose="020B0604020202020204" pitchFamily="34" charset="0"/>
+              </a:rPr>
+              <a:t> cədvəlinə ( modelinə ) `</a:t>
+            </a:r>
+            <a:r>
+              <a:rPr kumimoji="0" lang="az-Latn-AZ" altLang="en-US" sz="1300" b="1" i="0" u="none" strike="noStrike" cap="none" normalizeH="0" baseline="0">
+                <a:ln>
+                  <a:noFill/>
+                </a:ln>
+                <a:solidFill>
+                  <a:schemeClr val="tx1"/>
+                </a:solidFill>
+                <a:effectLst/>
+                <a:latin typeface="Arial" panose="020B0604020202020204" pitchFamily="34" charset="0"/>
+              </a:rPr>
+              <a:t>name</a:t>
+            </a:r>
+            <a:r>
+              <a:rPr kumimoji="0" lang="az-Latn-AZ" altLang="en-US" sz="1300" b="0" i="0" u="none" strike="noStrike" cap="none" normalizeH="0" baseline="0">
+                <a:ln>
+                  <a:noFill/>
+                </a:ln>
+                <a:solidFill>
+                  <a:schemeClr val="tx1"/>
+                </a:solidFill>
+                <a:effectLst/>
+                <a:latin typeface="Arial" panose="020B0604020202020204" pitchFamily="34" charset="0"/>
+              </a:rPr>
+              <a:t>` adında sütun əlavə edərək həmin cədvəli </a:t>
+            </a:r>
+          </a:p>
+          <a:p>
+            <a:pPr>
+              <a:lnSpc>
+                <a:spcPct val="150000"/>
+              </a:lnSpc>
+              <a:buNone/>
+            </a:pPr>
+            <a:r>
+              <a:rPr lang="az-Latn-AZ" altLang="en-US" sz="1300" b="1">
+                <a:latin typeface="Arial" panose="020B0604020202020204" pitchFamily="34" charset="0"/>
+              </a:rPr>
+              <a:t>migrate</a:t>
+            </a:r>
+            <a:r>
+              <a:rPr lang="az-Latn-AZ" altLang="en-US" sz="1300">
+                <a:latin typeface="Arial" panose="020B0604020202020204" pitchFamily="34" charset="0"/>
+              </a:rPr>
+              <a:t> edirik.</a:t>
+            </a:r>
+            <a:endParaRPr lang="en-US" altLang="en-US" sz="1300">
+              <a:latin typeface="Arial" panose="020B0604020202020204" pitchFamily="34" charset="0"/>
+            </a:endParaRPr>
+          </a:p>
+          <a:p>
+            <a:pPr>
+              <a:lnSpc>
+                <a:spcPct val="150000"/>
+              </a:lnSpc>
+              <a:buNone/>
+            </a:pPr>
+            <a:endParaRPr kumimoji="0" lang="en-US" altLang="en-US" sz="1300" b="0" i="0" u="none" strike="noStrike" cap="none" normalizeH="0" baseline="0">
+              <a:ln>
+                <a:noFill/>
+              </a:ln>
+              <a:solidFill>
+                <a:schemeClr val="tx1"/>
+              </a:solidFill>
+              <a:effectLst/>
+              <a:latin typeface="Arial" panose="020B0604020202020204" pitchFamily="34" charset="0"/>
+            </a:endParaRPr>
+          </a:p>
+          <a:p>
+            <a:pPr>
+              <a:lnSpc>
+                <a:spcPct val="150000"/>
+              </a:lnSpc>
+              <a:buNone/>
+            </a:pPr>
+            <a:endParaRPr lang="en-US" altLang="en-US" sz="1300">
+              <a:latin typeface="Arial" panose="020B0604020202020204" pitchFamily="34" charset="0"/>
+            </a:endParaRPr>
+          </a:p>
+          <a:p>
+            <a:pPr>
+              <a:lnSpc>
+                <a:spcPct val="150000"/>
+              </a:lnSpc>
+              <a:buNone/>
+            </a:pPr>
+            <a:endParaRPr kumimoji="0" lang="en-US" altLang="en-US" sz="1300" b="0" i="0" u="none" strike="noStrike" cap="none" normalizeH="0" baseline="0">
+              <a:ln>
+                <a:noFill/>
+              </a:ln>
+              <a:solidFill>
+                <a:schemeClr val="tx1"/>
+              </a:solidFill>
+              <a:effectLst/>
+              <a:latin typeface="Arial" panose="020B0604020202020204" pitchFamily="34" charset="0"/>
+            </a:endParaRPr>
+          </a:p>
+          <a:p>
+            <a:pPr>
+              <a:lnSpc>
+                <a:spcPct val="150000"/>
+              </a:lnSpc>
+              <a:buNone/>
+            </a:pPr>
+            <a:endParaRPr lang="en-US" altLang="en-US" sz="1300">
+              <a:latin typeface="Arial" panose="020B0604020202020204" pitchFamily="34" charset="0"/>
+            </a:endParaRPr>
+          </a:p>
+          <a:p>
+            <a:pPr>
+              <a:lnSpc>
+                <a:spcPct val="150000"/>
+              </a:lnSpc>
+              <a:buNone/>
+            </a:pPr>
+            <a:endParaRPr kumimoji="0" lang="en-US" altLang="en-US" sz="1300" b="0" i="0" u="none" strike="noStrike" cap="none" normalizeH="0" baseline="0">
+              <a:ln>
+                <a:noFill/>
+              </a:ln>
+              <a:solidFill>
+                <a:schemeClr val="tx1"/>
+              </a:solidFill>
+              <a:effectLst/>
+              <a:latin typeface="Arial" panose="020B0604020202020204" pitchFamily="34" charset="0"/>
+            </a:endParaRPr>
+          </a:p>
+          <a:p>
+            <a:pPr>
+              <a:lnSpc>
+                <a:spcPct val="150000"/>
+              </a:lnSpc>
+              <a:buNone/>
+            </a:pPr>
+            <a:endParaRPr kumimoji="0" lang="en-US" altLang="en-US" sz="1300" b="0" i="0" u="none" strike="noStrike" cap="none" normalizeH="0" baseline="0">
+              <a:ln>
+                <a:noFill/>
+              </a:ln>
+              <a:solidFill>
+                <a:schemeClr val="tx1"/>
+              </a:solidFill>
+              <a:effectLst/>
+              <a:latin typeface="Arial" panose="020B0604020202020204" pitchFamily="34" charset="0"/>
+            </a:endParaRPr>
+          </a:p>
+          <a:p>
+            <a:pPr>
+              <a:lnSpc>
+                <a:spcPct val="150000"/>
+              </a:lnSpc>
+              <a:buNone/>
+            </a:pPr>
+            <a:r>
+              <a:rPr lang="en-US" altLang="en-US" sz="1300">
+                <a:latin typeface="Arial" panose="020B0604020202020204" pitchFamily="34" charset="0"/>
+              </a:rPr>
+              <a:t>Sonra </a:t>
+            </a:r>
+            <a:r>
+              <a:rPr lang="az-Latn-AZ" altLang="en-US" sz="1300">
+                <a:latin typeface="Arial" panose="020B0604020202020204" pitchFamily="34" charset="0"/>
+              </a:rPr>
+              <a:t>isə </a:t>
+            </a:r>
+            <a:r>
+              <a:rPr lang="az-Latn-AZ" altLang="en-US" sz="1300" b="1">
+                <a:latin typeface="Arial" panose="020B0604020202020204" pitchFamily="34" charset="0"/>
+              </a:rPr>
+              <a:t>MANUL</a:t>
+            </a:r>
+            <a:r>
+              <a:rPr lang="az-Latn-AZ" altLang="en-US" sz="1300">
+                <a:latin typeface="Arial" panose="020B0604020202020204" pitchFamily="34" charset="0"/>
+              </a:rPr>
+              <a:t> olaraq </a:t>
+            </a:r>
+            <a:r>
+              <a:rPr lang="az-Latn-AZ" altLang="en-US" sz="1300" b="1">
+                <a:latin typeface="Arial" panose="020B0604020202020204" pitchFamily="34" charset="0"/>
+              </a:rPr>
+              <a:t>3</a:t>
+            </a:r>
+            <a:r>
+              <a:rPr lang="az-Latn-AZ" altLang="en-US" sz="1300">
+                <a:latin typeface="Arial" panose="020B0604020202020204" pitchFamily="34" charset="0"/>
+              </a:rPr>
+              <a:t> dənə data əlavə edirik </a:t>
+            </a:r>
+            <a:r>
+              <a:rPr lang="az-Latn-AZ" altLang="en-US" sz="1300" b="1">
+                <a:latin typeface="Arial" panose="020B0604020202020204" pitchFamily="34" charset="0"/>
+              </a:rPr>
+              <a:t>ROLE</a:t>
+            </a:r>
+            <a:r>
+              <a:rPr lang="az-Latn-AZ" altLang="en-US" sz="1300">
+                <a:latin typeface="Arial" panose="020B0604020202020204" pitchFamily="34" charset="0"/>
+              </a:rPr>
+              <a:t> cədvəlinə.</a:t>
+            </a:r>
+          </a:p>
+          <a:p>
+            <a:pPr>
+              <a:lnSpc>
+                <a:spcPct val="150000"/>
+              </a:lnSpc>
+              <a:buNone/>
+            </a:pPr>
+            <a:r>
+              <a:rPr kumimoji="0" lang="az-Latn-AZ" altLang="en-US" sz="1300" b="0" i="0" u="none" strike="noStrike" cap="none" normalizeH="0" baseline="0">
+                <a:ln>
+                  <a:noFill/>
+                </a:ln>
+                <a:solidFill>
+                  <a:schemeClr val="tx1"/>
+                </a:solidFill>
+                <a:effectLst/>
+                <a:latin typeface="Arial" panose="020B0604020202020204" pitchFamily="34" charset="0"/>
+              </a:rPr>
+              <a:t>Bu rollar </a:t>
+            </a:r>
+            <a:r>
+              <a:rPr lang="az-Latn-AZ" altLang="en-US" sz="1300">
+                <a:latin typeface="Arial" panose="020B0604020202020204" pitchFamily="34" charset="0"/>
+              </a:rPr>
+              <a:t>istifadəçilər üçün istifadə ediləcək. Ardı növbəti slaydda....</a:t>
+            </a:r>
+            <a:endParaRPr kumimoji="0" lang="en-US" altLang="en-US" sz="1300" b="0" i="0" u="none" strike="noStrike" cap="none" normalizeH="0" baseline="0">
+              <a:ln>
+                <a:noFill/>
+              </a:ln>
+              <a:solidFill>
+                <a:schemeClr val="tx1"/>
+              </a:solidFill>
+              <a:effectLst/>
+              <a:latin typeface="Arial" panose="020B0604020202020204" pitchFamily="34" charset="0"/>
+            </a:endParaRPr>
+          </a:p>
+        </p:txBody>
+      </p:sp>
+      <p:pic>
+        <p:nvPicPr>
+          <p:cNvPr id="4" name="Picture 3">
+            <a:extLst>
+              <a:ext uri="{FF2B5EF4-FFF2-40B4-BE49-F238E27FC236}">
+                <a16:creationId xmlns:a16="http://schemas.microsoft.com/office/drawing/2014/main" id="{EC3135C9-A951-89ED-BEB2-D4A8374B04D9}"/>
+              </a:ext>
+            </a:extLst>
+          </p:cNvPr>
+          <p:cNvPicPr>
+            <a:picLocks noChangeAspect="1"/>
+          </p:cNvPicPr>
+          <p:nvPr/>
+        </p:nvPicPr>
+        <p:blipFill>
+          <a:blip r:embed="rId2"/>
+          <a:stretch>
+            <a:fillRect/>
+          </a:stretch>
+        </p:blipFill>
+        <p:spPr>
+          <a:xfrm>
+            <a:off x="7487683" y="0"/>
+            <a:ext cx="4704317" cy="6858000"/>
+          </a:xfrm>
+          <a:prstGeom prst="rect">
+            <a:avLst/>
+          </a:prstGeom>
+        </p:spPr>
+      </p:pic>
+      <p:pic>
+        <p:nvPicPr>
+          <p:cNvPr id="8" name="Picture 7">
+            <a:extLst>
+              <a:ext uri="{FF2B5EF4-FFF2-40B4-BE49-F238E27FC236}">
+                <a16:creationId xmlns:a16="http://schemas.microsoft.com/office/drawing/2014/main" id="{04D4207B-3D90-14F5-0EF8-7A6664757F81}"/>
+              </a:ext>
+            </a:extLst>
+          </p:cNvPr>
+          <p:cNvPicPr>
+            <a:picLocks noChangeAspect="1"/>
+          </p:cNvPicPr>
+          <p:nvPr/>
+        </p:nvPicPr>
+        <p:blipFill>
+          <a:blip r:embed="rId3"/>
+          <a:stretch>
+            <a:fillRect/>
+          </a:stretch>
+        </p:blipFill>
+        <p:spPr>
+          <a:xfrm>
+            <a:off x="88405" y="3611417"/>
+            <a:ext cx="6120289" cy="3150468"/>
+          </a:xfrm>
+          <a:prstGeom prst="rect">
+            <a:avLst/>
+          </a:prstGeom>
+          <a:ln w="38100" cap="sq">
+            <a:solidFill>
+              <a:srgbClr val="000000"/>
+            </a:solidFill>
+            <a:prstDash val="solid"/>
+            <a:miter lim="800000"/>
+          </a:ln>
+          <a:effectLst>
+            <a:outerShdw blurRad="50800" dist="38100" dir="2700000" algn="tl" rotWithShape="0">
+              <a:srgbClr val="000000">
+                <a:alpha val="43000"/>
+              </a:srgbClr>
+            </a:outerShdw>
+          </a:effectLst>
+        </p:spPr>
+      </p:pic>
     </p:spTree>
     <p:extLst>
       <p:ext uri="{BB962C8B-B14F-4D97-AF65-F5344CB8AC3E}">
@@ -3541,6 +3971,1223 @@
               <a:buNone/>
             </a:pPr>
             <a:r>
+              <a:rPr kumimoji="0" lang="az-Latn-AZ" altLang="en-US" sz="1300" b="1" i="0" u="none" strike="noStrike" cap="none" normalizeH="0" baseline="0">
+                <a:ln>
+                  <a:noFill/>
+                </a:ln>
+                <a:solidFill>
+                  <a:schemeClr val="tx1"/>
+                </a:solidFill>
+                <a:effectLst/>
+                <a:latin typeface="Arial" panose="020B0604020202020204" pitchFamily="34" charset="0"/>
+              </a:rPr>
+              <a:t>Users</a:t>
+            </a:r>
+            <a:r>
+              <a:rPr kumimoji="0" lang="az-Latn-AZ" altLang="en-US" sz="1300" b="0" i="0" u="none" strike="noStrike" cap="none" normalizeH="0" baseline="0">
+                <a:ln>
+                  <a:noFill/>
+                </a:ln>
+                <a:solidFill>
+                  <a:schemeClr val="tx1"/>
+                </a:solidFill>
+                <a:effectLst/>
+                <a:latin typeface="Arial" panose="020B0604020202020204" pitchFamily="34" charset="0"/>
+              </a:rPr>
+              <a:t> üçün </a:t>
+            </a:r>
+            <a:r>
+              <a:rPr lang="az-Latn-AZ" altLang="en-US" sz="1300" b="1">
+                <a:latin typeface="Arial" panose="020B0604020202020204" pitchFamily="34" charset="0"/>
+              </a:rPr>
+              <a:t>rollar</a:t>
+            </a:r>
+            <a:r>
+              <a:rPr lang="az-Latn-AZ" altLang="en-US" sz="1300">
+                <a:latin typeface="Arial" panose="020B0604020202020204" pitchFamily="34" charset="0"/>
+              </a:rPr>
+              <a:t> təyin etmək üçün gərək </a:t>
+            </a:r>
+            <a:r>
+              <a:rPr lang="az-Latn-AZ" altLang="en-US" sz="1300" b="1">
+                <a:latin typeface="Arial" panose="020B0604020202020204" pitchFamily="34" charset="0"/>
+              </a:rPr>
+              <a:t>USERS</a:t>
+            </a:r>
+            <a:r>
+              <a:rPr lang="az-Latn-AZ" altLang="en-US" sz="1300">
+                <a:latin typeface="Arial" panose="020B0604020202020204" pitchFamily="34" charset="0"/>
+              </a:rPr>
+              <a:t> cədvəlinə </a:t>
+            </a:r>
+            <a:r>
+              <a:rPr lang="az-Latn-AZ" altLang="en-US" sz="1300" b="1">
+                <a:latin typeface="Arial" panose="020B0604020202020204" pitchFamily="34" charset="0"/>
+              </a:rPr>
+              <a:t>role_id </a:t>
+            </a:r>
+            <a:r>
+              <a:rPr lang="az-Latn-AZ" altLang="en-US" sz="1300">
+                <a:latin typeface="Arial" panose="020B0604020202020204" pitchFamily="34" charset="0"/>
+              </a:rPr>
+              <a:t>adında yeni bir </a:t>
+            </a:r>
+            <a:r>
+              <a:rPr lang="az-Latn-AZ" altLang="en-US" sz="1300" b="1">
+                <a:latin typeface="Arial" panose="020B0604020202020204" pitchFamily="34" charset="0"/>
+              </a:rPr>
+              <a:t>sütun</a:t>
+            </a:r>
+            <a:r>
+              <a:rPr lang="az-Latn-AZ" altLang="en-US" sz="1300">
+                <a:latin typeface="Arial" panose="020B0604020202020204" pitchFamily="34" charset="0"/>
+              </a:rPr>
+              <a:t> əlavə edək.</a:t>
+            </a:r>
+            <a:endParaRPr kumimoji="0" lang="en-US" altLang="en-US" sz="1300" b="0" i="0" u="none" strike="noStrike" cap="none" normalizeH="0" baseline="0">
+              <a:ln>
+                <a:noFill/>
+              </a:ln>
+              <a:solidFill>
+                <a:schemeClr val="tx1"/>
+              </a:solidFill>
+              <a:effectLst/>
+              <a:latin typeface="Arial" panose="020B0604020202020204" pitchFamily="34" charset="0"/>
+            </a:endParaRPr>
+          </a:p>
+        </p:txBody>
+      </p:sp>
+      <p:pic>
+        <p:nvPicPr>
+          <p:cNvPr id="8" name="Picture 7">
+            <a:extLst>
+              <a:ext uri="{FF2B5EF4-FFF2-40B4-BE49-F238E27FC236}">
+                <a16:creationId xmlns:a16="http://schemas.microsoft.com/office/drawing/2014/main" id="{37DB2360-03B0-B463-FF07-F24D28A13831}"/>
+              </a:ext>
+            </a:extLst>
+          </p:cNvPr>
+          <p:cNvPicPr>
+            <a:picLocks noChangeAspect="1"/>
+          </p:cNvPicPr>
+          <p:nvPr/>
+        </p:nvPicPr>
+        <p:blipFill>
+          <a:blip r:embed="rId2"/>
+          <a:stretch>
+            <a:fillRect/>
+          </a:stretch>
+        </p:blipFill>
+        <p:spPr>
+          <a:xfrm>
+            <a:off x="0" y="817418"/>
+            <a:ext cx="12192000" cy="6040582"/>
+          </a:xfrm>
+          <a:prstGeom prst="rect">
+            <a:avLst/>
+          </a:prstGeom>
+        </p:spPr>
+      </p:pic>
+    </p:spTree>
+    <p:extLst>
+      <p:ext uri="{BB962C8B-B14F-4D97-AF65-F5344CB8AC3E}">
+        <p14:creationId xmlns:p14="http://schemas.microsoft.com/office/powerpoint/2010/main" val="3095838342"/>
+      </p:ext>
+    </p:extLst>
+  </p:cSld>
+  <p:clrMapOvr>
+    <a:masterClrMapping/>
+  </p:clrMapOvr>
+</p:sld>
+</file>
+
+<file path=ppt/slides/slide4.xml><?xml version="1.0" encoding="utf-8"?>
+<p:sld xmlns:a="http://schemas.openxmlformats.org/drawingml/2006/main" xmlns:r="http://schemas.openxmlformats.org/officeDocument/2006/relationships" xmlns:p="http://schemas.openxmlformats.org/presentationml/2006/main">
+  <p:cSld>
+    <p:spTree>
+      <p:nvGrpSpPr>
+        <p:cNvPr id="1" name="">
+          <a:extLst>
+            <a:ext uri="{FF2B5EF4-FFF2-40B4-BE49-F238E27FC236}">
+              <a16:creationId xmlns:a16="http://schemas.microsoft.com/office/drawing/2014/main" id="{93B95B7F-181A-5795-C65F-4B4933854880}"/>
+            </a:ext>
+          </a:extLst>
+        </p:cNvPr>
+        <p:cNvGrpSpPr/>
+        <p:nvPr/>
+      </p:nvGrpSpPr>
+      <p:grpSpPr>
+        <a:xfrm>
+          <a:off x="0" y="0"/>
+          <a:ext cx="0" cy="0"/>
+          <a:chOff x="0" y="0"/>
+          <a:chExt cx="0" cy="0"/>
+        </a:xfrm>
+      </p:grpSpPr>
+      <p:sp>
+        <p:nvSpPr>
+          <p:cNvPr id="3" name="TextBox 2">
+            <a:extLst>
+              <a:ext uri="{FF2B5EF4-FFF2-40B4-BE49-F238E27FC236}">
+                <a16:creationId xmlns:a16="http://schemas.microsoft.com/office/drawing/2014/main" id="{FD9B3660-63D5-6325-B857-09319D0388EF}"/>
+              </a:ext>
+            </a:extLst>
+          </p:cNvPr>
+          <p:cNvSpPr txBox="1"/>
+          <p:nvPr/>
+        </p:nvSpPr>
+        <p:spPr>
+          <a:xfrm>
+            <a:off x="217714" y="255046"/>
+            <a:ext cx="11756571" cy="355354"/>
+          </a:xfrm>
+          <a:prstGeom prst="rect">
+            <a:avLst/>
+          </a:prstGeom>
+          <a:noFill/>
+        </p:spPr>
+        <p:txBody>
+          <a:bodyPr wrap="square">
+            <a:spAutoFit/>
+          </a:bodyPr>
+          <a:lstStyle/>
+          <a:p>
+            <a:pPr>
+              <a:lnSpc>
+                <a:spcPct val="150000"/>
+              </a:lnSpc>
+              <a:buNone/>
+            </a:pPr>
+            <a:r>
+              <a:rPr lang="az-Latn-AZ" altLang="en-US" sz="1300">
+                <a:latin typeface="Arial" panose="020B0604020202020204" pitchFamily="34" charset="0"/>
+              </a:rPr>
+              <a:t>İstifadəçi sayımız az olduğu üçün 2 dənədə əlavə </a:t>
+            </a:r>
+            <a:r>
+              <a:rPr lang="az-Latn-AZ" altLang="en-US" sz="1300" b="1">
+                <a:latin typeface="Arial" panose="020B0604020202020204" pitchFamily="34" charset="0"/>
+              </a:rPr>
+              <a:t>user</a:t>
+            </a:r>
+            <a:r>
+              <a:rPr lang="az-Latn-AZ" altLang="en-US" sz="1300">
+                <a:latin typeface="Arial" panose="020B0604020202020204" pitchFamily="34" charset="0"/>
+              </a:rPr>
+              <a:t> qeydiyyatdan keçiririk.</a:t>
+            </a:r>
+            <a:endParaRPr kumimoji="0" lang="en-US" altLang="en-US" sz="1300" b="0" i="0" u="none" strike="noStrike" cap="none" normalizeH="0" baseline="0">
+              <a:ln>
+                <a:noFill/>
+              </a:ln>
+              <a:solidFill>
+                <a:schemeClr val="tx1"/>
+              </a:solidFill>
+              <a:effectLst/>
+              <a:latin typeface="Arial" panose="020B0604020202020204" pitchFamily="34" charset="0"/>
+            </a:endParaRPr>
+          </a:p>
+        </p:txBody>
+      </p:sp>
+      <p:pic>
+        <p:nvPicPr>
+          <p:cNvPr id="4" name="Picture 3">
+            <a:extLst>
+              <a:ext uri="{FF2B5EF4-FFF2-40B4-BE49-F238E27FC236}">
+                <a16:creationId xmlns:a16="http://schemas.microsoft.com/office/drawing/2014/main" id="{0FF460CA-36F1-A232-BBD4-9043DEFAB8B8}"/>
+              </a:ext>
+            </a:extLst>
+          </p:cNvPr>
+          <p:cNvPicPr>
+            <a:picLocks noChangeAspect="1"/>
+          </p:cNvPicPr>
+          <p:nvPr/>
+        </p:nvPicPr>
+        <p:blipFill>
+          <a:blip r:embed="rId2"/>
+          <a:stretch>
+            <a:fillRect/>
+          </a:stretch>
+        </p:blipFill>
+        <p:spPr>
+          <a:xfrm>
+            <a:off x="0" y="2287608"/>
+            <a:ext cx="4640228" cy="4570392"/>
+          </a:xfrm>
+          <a:prstGeom prst="rect">
+            <a:avLst/>
+          </a:prstGeom>
+        </p:spPr>
+      </p:pic>
+      <p:pic>
+        <p:nvPicPr>
+          <p:cNvPr id="6" name="Picture 5">
+            <a:extLst>
+              <a:ext uri="{FF2B5EF4-FFF2-40B4-BE49-F238E27FC236}">
+                <a16:creationId xmlns:a16="http://schemas.microsoft.com/office/drawing/2014/main" id="{AF8ED69B-3998-EA13-F278-3E1B589F38FB}"/>
+              </a:ext>
+            </a:extLst>
+          </p:cNvPr>
+          <p:cNvPicPr>
+            <a:picLocks noChangeAspect="1"/>
+          </p:cNvPicPr>
+          <p:nvPr/>
+        </p:nvPicPr>
+        <p:blipFill>
+          <a:blip r:embed="rId3"/>
+          <a:stretch>
+            <a:fillRect/>
+          </a:stretch>
+        </p:blipFill>
+        <p:spPr>
+          <a:xfrm>
+            <a:off x="7952095" y="2287608"/>
+            <a:ext cx="4239905" cy="4570392"/>
+          </a:xfrm>
+          <a:prstGeom prst="rect">
+            <a:avLst/>
+          </a:prstGeom>
+        </p:spPr>
+      </p:pic>
+    </p:spTree>
+    <p:extLst>
+      <p:ext uri="{BB962C8B-B14F-4D97-AF65-F5344CB8AC3E}">
+        <p14:creationId xmlns:p14="http://schemas.microsoft.com/office/powerpoint/2010/main" val="3317613454"/>
+      </p:ext>
+    </p:extLst>
+  </p:cSld>
+  <p:clrMapOvr>
+    <a:masterClrMapping/>
+  </p:clrMapOvr>
+</p:sld>
+</file>
+
+<file path=ppt/slides/slide5.xml><?xml version="1.0" encoding="utf-8"?>
+<p:sld xmlns:a="http://schemas.openxmlformats.org/drawingml/2006/main" xmlns:r="http://schemas.openxmlformats.org/officeDocument/2006/relationships" xmlns:p="http://schemas.openxmlformats.org/presentationml/2006/main">
+  <p:cSld>
+    <p:spTree>
+      <p:nvGrpSpPr>
+        <p:cNvPr id="1" name="">
+          <a:extLst>
+            <a:ext uri="{FF2B5EF4-FFF2-40B4-BE49-F238E27FC236}">
+              <a16:creationId xmlns:a16="http://schemas.microsoft.com/office/drawing/2014/main" id="{0CF57108-4346-2E35-15E8-B8CA6A846736}"/>
+            </a:ext>
+          </a:extLst>
+        </p:cNvPr>
+        <p:cNvGrpSpPr/>
+        <p:nvPr/>
+      </p:nvGrpSpPr>
+      <p:grpSpPr>
+        <a:xfrm>
+          <a:off x="0" y="0"/>
+          <a:ext cx="0" cy="0"/>
+          <a:chOff x="0" y="0"/>
+          <a:chExt cx="0" cy="0"/>
+        </a:xfrm>
+      </p:grpSpPr>
+      <p:sp>
+        <p:nvSpPr>
+          <p:cNvPr id="3" name="TextBox 2">
+            <a:extLst>
+              <a:ext uri="{FF2B5EF4-FFF2-40B4-BE49-F238E27FC236}">
+                <a16:creationId xmlns:a16="http://schemas.microsoft.com/office/drawing/2014/main" id="{E092FD5F-FD28-9E4C-661B-ED2FE504FC95}"/>
+              </a:ext>
+            </a:extLst>
+          </p:cNvPr>
+          <p:cNvSpPr txBox="1"/>
+          <p:nvPr/>
+        </p:nvSpPr>
+        <p:spPr>
+          <a:xfrm>
+            <a:off x="217714" y="84626"/>
+            <a:ext cx="11756571" cy="822726"/>
+          </a:xfrm>
+          <a:prstGeom prst="rect">
+            <a:avLst/>
+          </a:prstGeom>
+          <a:noFill/>
+        </p:spPr>
+        <p:txBody>
+          <a:bodyPr wrap="square">
+            <a:spAutoFit/>
+          </a:bodyPr>
+          <a:lstStyle/>
+          <a:p>
+            <a:pPr>
+              <a:lnSpc>
+                <a:spcPct val="150000"/>
+              </a:lnSpc>
+              <a:buNone/>
+            </a:pPr>
+            <a:r>
+              <a:rPr lang="az-Latn-AZ" altLang="en-US" sz="1100">
+                <a:latin typeface="Arial" panose="020B0604020202020204" pitchFamily="34" charset="0"/>
+              </a:rPr>
+              <a:t>Sonra isə hər </a:t>
+            </a:r>
+            <a:r>
+              <a:rPr lang="az-Latn-AZ" altLang="en-US" sz="1100" b="1">
+                <a:latin typeface="Arial" panose="020B0604020202020204" pitchFamily="34" charset="0"/>
+              </a:rPr>
+              <a:t>USERS</a:t>
+            </a:r>
+            <a:r>
+              <a:rPr lang="az-Latn-AZ" altLang="en-US" sz="1100">
+                <a:latin typeface="Arial" panose="020B0604020202020204" pitchFamily="34" charset="0"/>
+              </a:rPr>
+              <a:t> üçün bir </a:t>
+            </a:r>
+            <a:r>
+              <a:rPr lang="az-Latn-AZ" altLang="en-US" sz="1100" b="1">
+                <a:latin typeface="Arial" panose="020B0604020202020204" pitchFamily="34" charset="0"/>
+              </a:rPr>
+              <a:t>ROLE</a:t>
+            </a:r>
+            <a:r>
+              <a:rPr lang="az-Latn-AZ" altLang="en-US" sz="1100">
+                <a:latin typeface="Arial" panose="020B0604020202020204" pitchFamily="34" charset="0"/>
+              </a:rPr>
+              <a:t> təyin edirik. Yəni </a:t>
+            </a:r>
+            <a:r>
+              <a:rPr lang="az-Latn-AZ" altLang="en-US" sz="1100" b="1">
+                <a:latin typeface="Arial" panose="020B0604020202020204" pitchFamily="34" charset="0"/>
+              </a:rPr>
+              <a:t>ROLE</a:t>
+            </a:r>
+            <a:r>
+              <a:rPr lang="az-Latn-AZ" altLang="en-US" sz="1100">
+                <a:latin typeface="Arial" panose="020B0604020202020204" pitchFamily="34" charset="0"/>
+              </a:rPr>
+              <a:t> cədvəlinin </a:t>
+            </a:r>
+            <a:r>
+              <a:rPr lang="az-Latn-AZ" altLang="en-US" sz="1100" b="1">
+                <a:latin typeface="Arial" panose="020B0604020202020204" pitchFamily="34" charset="0"/>
+              </a:rPr>
+              <a:t>İD</a:t>
+            </a:r>
+            <a:r>
+              <a:rPr lang="az-Latn-AZ" altLang="en-US" sz="1100">
+                <a:latin typeface="Arial" panose="020B0604020202020204" pitchFamily="34" charset="0"/>
+              </a:rPr>
+              <a:t> </a:t>
+            </a:r>
+            <a:r>
+              <a:rPr lang="en-US" altLang="en-US" sz="1100">
+                <a:latin typeface="Arial" panose="020B0604020202020204" pitchFamily="34" charset="0"/>
+              </a:rPr>
+              <a:t>-</a:t>
+            </a:r>
+            <a:r>
+              <a:rPr lang="az-Latn-AZ" altLang="en-US" sz="1100">
+                <a:latin typeface="Arial" panose="020B0604020202020204" pitchFamily="34" charset="0"/>
+              </a:rPr>
+              <a:t>lərindən hər birini </a:t>
+            </a:r>
+            <a:r>
+              <a:rPr lang="az-Latn-AZ" altLang="en-US" sz="1100" b="1">
+                <a:latin typeface="Arial" panose="020B0604020202020204" pitchFamily="34" charset="0"/>
+              </a:rPr>
+              <a:t>USERS</a:t>
+            </a:r>
+            <a:r>
+              <a:rPr lang="az-Latn-AZ" altLang="en-US" sz="1100">
+                <a:latin typeface="Arial" panose="020B0604020202020204" pitchFamily="34" charset="0"/>
+              </a:rPr>
+              <a:t> cədvəlinin </a:t>
+            </a:r>
+            <a:r>
+              <a:rPr lang="az-Latn-AZ" altLang="en-US" sz="1100" b="1">
+                <a:latin typeface="Arial" panose="020B0604020202020204" pitchFamily="34" charset="0"/>
+              </a:rPr>
+              <a:t>ROLE_İD</a:t>
+            </a:r>
+            <a:r>
+              <a:rPr lang="az-Latn-AZ" altLang="en-US" sz="1100">
+                <a:latin typeface="Arial" panose="020B0604020202020204" pitchFamily="34" charset="0"/>
+              </a:rPr>
+              <a:t> sütununa </a:t>
+            </a:r>
+            <a:r>
+              <a:rPr lang="en-US" altLang="en-US" sz="1100">
+                <a:latin typeface="Arial" panose="020B0604020202020204" pitchFamily="34" charset="0"/>
+              </a:rPr>
+              <a:t>manual </a:t>
+            </a:r>
+            <a:r>
+              <a:rPr lang="az-Latn-AZ" altLang="en-US" sz="1100">
+                <a:latin typeface="Arial" panose="020B0604020202020204" pitchFamily="34" charset="0"/>
+              </a:rPr>
+              <a:t>yazırıq. </a:t>
+            </a:r>
+            <a:endParaRPr lang="en-US" altLang="en-US" sz="1100">
+              <a:latin typeface="Arial" panose="020B0604020202020204" pitchFamily="34" charset="0"/>
+            </a:endParaRPr>
+          </a:p>
+          <a:p>
+            <a:pPr>
+              <a:lnSpc>
+                <a:spcPct val="150000"/>
+              </a:lnSpc>
+              <a:buNone/>
+            </a:pPr>
+            <a:r>
+              <a:rPr lang="az-Latn-AZ" altLang="en-US" sz="1100">
+                <a:latin typeface="Arial" panose="020B0604020202020204" pitchFamily="34" charset="0"/>
+              </a:rPr>
+              <a:t>Nəzərə alın ki, </a:t>
+            </a:r>
+            <a:r>
+              <a:rPr lang="az-Latn-AZ" altLang="en-US" sz="1100" b="1">
+                <a:latin typeface="Arial" panose="020B0604020202020204" pitchFamily="34" charset="0"/>
+              </a:rPr>
+              <a:t>ROLE</a:t>
+            </a:r>
+            <a:r>
+              <a:rPr lang="az-Latn-AZ" altLang="en-US" sz="1100">
+                <a:latin typeface="Arial" panose="020B0604020202020204" pitchFamily="34" charset="0"/>
+              </a:rPr>
+              <a:t> adlı cədvəl nümunə üçün yaradılıbdır. Yəni </a:t>
+            </a:r>
+            <a:r>
+              <a:rPr lang="az-Latn-AZ" altLang="en-US" sz="1100" b="1">
+                <a:latin typeface="Arial" panose="020B0604020202020204" pitchFamily="34" charset="0"/>
+              </a:rPr>
+              <a:t>USERS</a:t>
+            </a:r>
+            <a:r>
+              <a:rPr lang="az-Latn-AZ" altLang="en-US" sz="1100">
+                <a:latin typeface="Arial" panose="020B0604020202020204" pitchFamily="34" charset="0"/>
+              </a:rPr>
+              <a:t> modelində heçbir </a:t>
+            </a:r>
+            <a:r>
+              <a:rPr lang="az-Latn-AZ" altLang="en-US" sz="1100" b="1">
+                <a:latin typeface="Arial" panose="020B0604020202020204" pitchFamily="34" charset="0"/>
+              </a:rPr>
+              <a:t>relation</a:t>
+            </a:r>
+            <a:r>
+              <a:rPr lang="az-Latn-AZ" altLang="en-US" sz="1100">
+                <a:latin typeface="Arial" panose="020B0604020202020204" pitchFamily="34" charset="0"/>
+              </a:rPr>
+              <a:t> metodu yaradılmayıbdır. Yaxud </a:t>
+            </a:r>
+            <a:r>
+              <a:rPr lang="az-Latn-AZ" altLang="en-US" sz="1100" b="1">
+                <a:latin typeface="Arial" panose="020B0604020202020204" pitchFamily="34" charset="0"/>
+              </a:rPr>
+              <a:t>Controllerdə</a:t>
+            </a:r>
+            <a:r>
+              <a:rPr lang="az-Latn-AZ" altLang="en-US" sz="1100">
+                <a:latin typeface="Arial" panose="020B0604020202020204" pitchFamily="34" charset="0"/>
+              </a:rPr>
+              <a:t> bununla bağlı heçnə yoxdur....</a:t>
+            </a:r>
+          </a:p>
+          <a:p>
+            <a:pPr>
+              <a:lnSpc>
+                <a:spcPct val="150000"/>
+              </a:lnSpc>
+              <a:buNone/>
+            </a:pPr>
+            <a:r>
+              <a:rPr lang="az-Latn-AZ" altLang="en-US" sz="1100">
+                <a:latin typeface="Arial" panose="020B0604020202020204" pitchFamily="34" charset="0"/>
+              </a:rPr>
+              <a:t>Əvvəlki dərslərdən bunları artıq bilirik. </a:t>
+            </a:r>
+            <a:endParaRPr kumimoji="0" lang="en-US" altLang="en-US" sz="1100" b="0" i="0" u="none" strike="noStrike" cap="none" normalizeH="0" baseline="0">
+              <a:ln>
+                <a:noFill/>
+              </a:ln>
+              <a:solidFill>
+                <a:schemeClr val="tx1"/>
+              </a:solidFill>
+              <a:effectLst/>
+              <a:latin typeface="Arial" panose="020B0604020202020204" pitchFamily="34" charset="0"/>
+            </a:endParaRPr>
+          </a:p>
+        </p:txBody>
+      </p:sp>
+      <p:pic>
+        <p:nvPicPr>
+          <p:cNvPr id="4" name="Picture 3">
+            <a:extLst>
+              <a:ext uri="{FF2B5EF4-FFF2-40B4-BE49-F238E27FC236}">
+                <a16:creationId xmlns:a16="http://schemas.microsoft.com/office/drawing/2014/main" id="{267A01DD-3551-9769-8FB0-30D6B809AEB2}"/>
+              </a:ext>
+            </a:extLst>
+          </p:cNvPr>
+          <p:cNvPicPr>
+            <a:picLocks noChangeAspect="1"/>
+          </p:cNvPicPr>
+          <p:nvPr/>
+        </p:nvPicPr>
+        <p:blipFill>
+          <a:blip r:embed="rId2"/>
+          <a:stretch>
+            <a:fillRect/>
+          </a:stretch>
+        </p:blipFill>
+        <p:spPr>
+          <a:xfrm>
+            <a:off x="0" y="4158794"/>
+            <a:ext cx="12192000" cy="2664570"/>
+          </a:xfrm>
+          <a:prstGeom prst="rect">
+            <a:avLst/>
+          </a:prstGeom>
+          <a:ln w="38100" cap="sq">
+            <a:solidFill>
+              <a:srgbClr val="000000"/>
+            </a:solidFill>
+            <a:prstDash val="solid"/>
+            <a:miter lim="800000"/>
+          </a:ln>
+          <a:effectLst>
+            <a:outerShdw blurRad="50800" dist="38100" dir="2700000" algn="tl" rotWithShape="0">
+              <a:srgbClr val="000000">
+                <a:alpha val="43000"/>
+              </a:srgbClr>
+            </a:outerShdw>
+          </a:effectLst>
+        </p:spPr>
+      </p:pic>
+      <p:pic>
+        <p:nvPicPr>
+          <p:cNvPr id="6" name="Picture 5">
+            <a:extLst>
+              <a:ext uri="{FF2B5EF4-FFF2-40B4-BE49-F238E27FC236}">
+                <a16:creationId xmlns:a16="http://schemas.microsoft.com/office/drawing/2014/main" id="{5614F956-235D-3CB5-4048-E4821AE96BD6}"/>
+              </a:ext>
+            </a:extLst>
+          </p:cNvPr>
+          <p:cNvPicPr>
+            <a:picLocks noChangeAspect="1"/>
+          </p:cNvPicPr>
+          <p:nvPr/>
+        </p:nvPicPr>
+        <p:blipFill>
+          <a:blip r:embed="rId3"/>
+          <a:stretch>
+            <a:fillRect/>
+          </a:stretch>
+        </p:blipFill>
+        <p:spPr>
+          <a:xfrm>
+            <a:off x="0" y="1199133"/>
+            <a:ext cx="12192000" cy="2667880"/>
+          </a:xfrm>
+          <a:prstGeom prst="rect">
+            <a:avLst/>
+          </a:prstGeom>
+          <a:ln w="38100" cap="sq">
+            <a:solidFill>
+              <a:srgbClr val="000000"/>
+            </a:solidFill>
+            <a:prstDash val="solid"/>
+            <a:miter lim="800000"/>
+          </a:ln>
+          <a:effectLst>
+            <a:outerShdw blurRad="50800" dist="38100" dir="2700000" algn="tl" rotWithShape="0">
+              <a:srgbClr val="000000">
+                <a:alpha val="43000"/>
+              </a:srgbClr>
+            </a:outerShdw>
+          </a:effectLst>
+        </p:spPr>
+      </p:pic>
+    </p:spTree>
+    <p:extLst>
+      <p:ext uri="{BB962C8B-B14F-4D97-AF65-F5344CB8AC3E}">
+        <p14:creationId xmlns:p14="http://schemas.microsoft.com/office/powerpoint/2010/main" val="3110690483"/>
+      </p:ext>
+    </p:extLst>
+  </p:cSld>
+  <p:clrMapOvr>
+    <a:masterClrMapping/>
+  </p:clrMapOvr>
+</p:sld>
+</file>
+
+<file path=ppt/slides/slide6.xml><?xml version="1.0" encoding="utf-8"?>
+<p:sld xmlns:a="http://schemas.openxmlformats.org/drawingml/2006/main" xmlns:r="http://schemas.openxmlformats.org/officeDocument/2006/relationships" xmlns:p="http://schemas.openxmlformats.org/presentationml/2006/main">
+  <p:cSld>
+    <p:spTree>
+      <p:nvGrpSpPr>
+        <p:cNvPr id="1" name="">
+          <a:extLst>
+            <a:ext uri="{FF2B5EF4-FFF2-40B4-BE49-F238E27FC236}">
+              <a16:creationId xmlns:a16="http://schemas.microsoft.com/office/drawing/2014/main" id="{097F566A-0954-54CC-1405-AD99E8C0C251}"/>
+            </a:ext>
+          </a:extLst>
+        </p:cNvPr>
+        <p:cNvGrpSpPr/>
+        <p:nvPr/>
+      </p:nvGrpSpPr>
+      <p:grpSpPr>
+        <a:xfrm>
+          <a:off x="0" y="0"/>
+          <a:ext cx="0" cy="0"/>
+          <a:chOff x="0" y="0"/>
+          <a:chExt cx="0" cy="0"/>
+        </a:xfrm>
+      </p:grpSpPr>
+      <p:sp>
+        <p:nvSpPr>
+          <p:cNvPr id="3" name="TextBox 2">
+            <a:extLst>
+              <a:ext uri="{FF2B5EF4-FFF2-40B4-BE49-F238E27FC236}">
+                <a16:creationId xmlns:a16="http://schemas.microsoft.com/office/drawing/2014/main" id="{5CAE2D87-3D40-B02D-1848-49E3CB3B82FF}"/>
+              </a:ext>
+            </a:extLst>
+          </p:cNvPr>
+          <p:cNvSpPr txBox="1"/>
+          <p:nvPr/>
+        </p:nvSpPr>
+        <p:spPr>
+          <a:xfrm>
+            <a:off x="217714" y="255046"/>
+            <a:ext cx="11756571" cy="2455929"/>
+          </a:xfrm>
+          <a:prstGeom prst="rect">
+            <a:avLst/>
+          </a:prstGeom>
+          <a:noFill/>
+        </p:spPr>
+        <p:txBody>
+          <a:bodyPr wrap="square">
+            <a:spAutoFit/>
+          </a:bodyPr>
+          <a:lstStyle/>
+          <a:p>
+            <a:pPr>
+              <a:lnSpc>
+                <a:spcPct val="150000"/>
+              </a:lnSpc>
+              <a:buNone/>
+            </a:pPr>
+            <a:r>
+              <a:rPr lang="az-Latn-AZ" altLang="en-US" sz="1300" b="1">
+                <a:latin typeface="Arial" panose="020B0604020202020204" pitchFamily="34" charset="0"/>
+              </a:rPr>
+              <a:t>role_id = 1 </a:t>
+            </a:r>
+            <a:r>
+              <a:rPr lang="az-Latn-AZ" altLang="en-US" sz="1300">
+                <a:latin typeface="Arial" panose="020B0604020202020204" pitchFamily="34" charset="0"/>
+              </a:rPr>
+              <a:t>olanlar </a:t>
+            </a:r>
+            <a:r>
+              <a:rPr lang="az-Latn-AZ" altLang="en-US" sz="1300" b="1">
+                <a:latin typeface="Arial" panose="020B0604020202020204" pitchFamily="34" charset="0"/>
+              </a:rPr>
+              <a:t>CREATE, UPDATE, DELETE  </a:t>
+            </a:r>
+            <a:r>
+              <a:rPr lang="az-Latn-AZ" altLang="en-US" sz="1300">
+                <a:latin typeface="Arial" panose="020B0604020202020204" pitchFamily="34" charset="0"/>
+              </a:rPr>
+              <a:t>edə biləcəklər.</a:t>
+            </a:r>
+          </a:p>
+          <a:p>
+            <a:pPr>
+              <a:lnSpc>
+                <a:spcPct val="150000"/>
+              </a:lnSpc>
+              <a:buNone/>
+            </a:pPr>
+            <a:endParaRPr kumimoji="0" lang="az-Latn-AZ" altLang="en-US" sz="1300" b="0" i="0" u="none" strike="noStrike" cap="none" normalizeH="0" baseline="0">
+              <a:ln>
+                <a:noFill/>
+              </a:ln>
+              <a:solidFill>
+                <a:schemeClr val="tx1"/>
+              </a:solidFill>
+              <a:effectLst/>
+              <a:latin typeface="Arial" panose="020B0604020202020204" pitchFamily="34" charset="0"/>
+            </a:endParaRPr>
+          </a:p>
+          <a:p>
+            <a:pPr>
+              <a:lnSpc>
+                <a:spcPct val="150000"/>
+              </a:lnSpc>
+              <a:buNone/>
+            </a:pPr>
+            <a:endParaRPr kumimoji="0" lang="az-Latn-AZ" altLang="en-US" sz="1300" b="0" i="0" u="none" strike="noStrike" cap="none" normalizeH="0" baseline="0">
+              <a:ln>
+                <a:noFill/>
+              </a:ln>
+              <a:solidFill>
+                <a:schemeClr val="tx1"/>
+              </a:solidFill>
+              <a:effectLst/>
+              <a:latin typeface="Arial" panose="020B0604020202020204" pitchFamily="34" charset="0"/>
+            </a:endParaRPr>
+          </a:p>
+          <a:p>
+            <a:pPr>
+              <a:lnSpc>
+                <a:spcPct val="150000"/>
+              </a:lnSpc>
+            </a:pPr>
+            <a:r>
+              <a:rPr lang="az-Latn-AZ" altLang="en-US" sz="1300" b="1">
+                <a:latin typeface="Arial" panose="020B0604020202020204" pitchFamily="34" charset="0"/>
+              </a:rPr>
+              <a:t>role_id = 2 </a:t>
+            </a:r>
+            <a:r>
+              <a:rPr lang="az-Latn-AZ" altLang="en-US" sz="1300">
+                <a:latin typeface="Arial" panose="020B0604020202020204" pitchFamily="34" charset="0"/>
+              </a:rPr>
+              <a:t>olanlar </a:t>
+            </a:r>
+            <a:r>
+              <a:rPr lang="az-Latn-AZ" altLang="en-US" sz="1300" b="1">
+                <a:latin typeface="Arial" panose="020B0604020202020204" pitchFamily="34" charset="0"/>
+              </a:rPr>
+              <a:t>CREATE, UPDATE</a:t>
+            </a:r>
+            <a:r>
+              <a:rPr lang="az-Latn-AZ" altLang="en-US" sz="1300">
+                <a:latin typeface="Arial" panose="020B0604020202020204" pitchFamily="34" charset="0"/>
+              </a:rPr>
+              <a:t> edə biləcəklər.</a:t>
+            </a:r>
+            <a:endParaRPr kumimoji="0" lang="en-US" altLang="en-US" sz="1300" b="0" i="0" u="none" strike="noStrike" cap="none" normalizeH="0" baseline="0">
+              <a:ln>
+                <a:noFill/>
+              </a:ln>
+              <a:solidFill>
+                <a:schemeClr val="tx1"/>
+              </a:solidFill>
+              <a:effectLst/>
+              <a:latin typeface="Arial" panose="020B0604020202020204" pitchFamily="34" charset="0"/>
+            </a:endParaRPr>
+          </a:p>
+          <a:p>
+            <a:pPr>
+              <a:lnSpc>
+                <a:spcPct val="150000"/>
+              </a:lnSpc>
+              <a:buNone/>
+            </a:pPr>
+            <a:endParaRPr lang="az-Latn-AZ" altLang="en-US" sz="1300">
+              <a:latin typeface="Arial" panose="020B0604020202020204" pitchFamily="34" charset="0"/>
+            </a:endParaRPr>
+          </a:p>
+          <a:p>
+            <a:pPr>
+              <a:lnSpc>
+                <a:spcPct val="150000"/>
+              </a:lnSpc>
+              <a:buNone/>
+            </a:pPr>
+            <a:endParaRPr kumimoji="0" lang="az-Latn-AZ" altLang="en-US" sz="1300" b="0" i="0" u="none" strike="noStrike" cap="none" normalizeH="0" baseline="0">
+              <a:ln>
+                <a:noFill/>
+              </a:ln>
+              <a:solidFill>
+                <a:schemeClr val="tx1"/>
+              </a:solidFill>
+              <a:effectLst/>
+              <a:latin typeface="Arial" panose="020B0604020202020204" pitchFamily="34" charset="0"/>
+            </a:endParaRPr>
+          </a:p>
+          <a:p>
+            <a:pPr>
+              <a:lnSpc>
+                <a:spcPct val="150000"/>
+              </a:lnSpc>
+            </a:pPr>
+            <a:r>
+              <a:rPr lang="az-Latn-AZ" altLang="en-US" sz="1300" b="1">
+                <a:latin typeface="Arial" panose="020B0604020202020204" pitchFamily="34" charset="0"/>
+              </a:rPr>
+              <a:t>role_id = 3 </a:t>
+            </a:r>
+            <a:r>
+              <a:rPr lang="az-Latn-AZ" altLang="en-US" sz="1300">
+                <a:latin typeface="Arial" panose="020B0604020202020204" pitchFamily="34" charset="0"/>
+              </a:rPr>
+              <a:t>olanlar heçnə edə bilməyəcəklər.</a:t>
+            </a:r>
+            <a:endParaRPr kumimoji="0" lang="en-US" altLang="en-US" sz="1300" b="0" i="0" u="none" strike="noStrike" cap="none" normalizeH="0" baseline="0">
+              <a:ln>
+                <a:noFill/>
+              </a:ln>
+              <a:solidFill>
+                <a:schemeClr val="tx1"/>
+              </a:solidFill>
+              <a:effectLst/>
+              <a:latin typeface="Arial" panose="020B0604020202020204" pitchFamily="34" charset="0"/>
+            </a:endParaRPr>
+          </a:p>
+          <a:p>
+            <a:pPr>
+              <a:lnSpc>
+                <a:spcPct val="150000"/>
+              </a:lnSpc>
+              <a:buNone/>
+            </a:pPr>
+            <a:endParaRPr kumimoji="0" lang="en-US" altLang="en-US" sz="1300" b="0" i="0" u="none" strike="noStrike" cap="none" normalizeH="0" baseline="0">
+              <a:ln>
+                <a:noFill/>
+              </a:ln>
+              <a:solidFill>
+                <a:schemeClr val="tx1"/>
+              </a:solidFill>
+              <a:effectLst/>
+              <a:latin typeface="Arial" panose="020B0604020202020204" pitchFamily="34" charset="0"/>
+            </a:endParaRPr>
+          </a:p>
+        </p:txBody>
+      </p:sp>
+      <p:pic>
+        <p:nvPicPr>
+          <p:cNvPr id="6" name="Picture 5">
+            <a:extLst>
+              <a:ext uri="{FF2B5EF4-FFF2-40B4-BE49-F238E27FC236}">
+                <a16:creationId xmlns:a16="http://schemas.microsoft.com/office/drawing/2014/main" id="{547ABFD4-CF04-B556-D241-DEDF3CE80BA7}"/>
+              </a:ext>
+            </a:extLst>
+          </p:cNvPr>
+          <p:cNvPicPr>
+            <a:picLocks noChangeAspect="1"/>
+          </p:cNvPicPr>
+          <p:nvPr/>
+        </p:nvPicPr>
+        <p:blipFill>
+          <a:blip r:embed="rId2"/>
+          <a:stretch>
+            <a:fillRect/>
+          </a:stretch>
+        </p:blipFill>
+        <p:spPr>
+          <a:xfrm>
+            <a:off x="8084574" y="0"/>
+            <a:ext cx="4107426" cy="6858000"/>
+          </a:xfrm>
+          <a:prstGeom prst="rect">
+            <a:avLst/>
+          </a:prstGeom>
+        </p:spPr>
+      </p:pic>
+    </p:spTree>
+    <p:extLst>
+      <p:ext uri="{BB962C8B-B14F-4D97-AF65-F5344CB8AC3E}">
+        <p14:creationId xmlns:p14="http://schemas.microsoft.com/office/powerpoint/2010/main" val="1250609568"/>
+      </p:ext>
+    </p:extLst>
+  </p:cSld>
+  <p:clrMapOvr>
+    <a:masterClrMapping/>
+  </p:clrMapOvr>
+</p:sld>
+</file>
+
+<file path=ppt/slides/slide7.xml><?xml version="1.0" encoding="utf-8"?>
+<p:sld xmlns:a="http://schemas.openxmlformats.org/drawingml/2006/main" xmlns:r="http://schemas.openxmlformats.org/officeDocument/2006/relationships" xmlns:p="http://schemas.openxmlformats.org/presentationml/2006/main">
+  <p:cSld>
+    <p:spTree>
+      <p:nvGrpSpPr>
+        <p:cNvPr id="1" name="">
+          <a:extLst>
+            <a:ext uri="{FF2B5EF4-FFF2-40B4-BE49-F238E27FC236}">
+              <a16:creationId xmlns:a16="http://schemas.microsoft.com/office/drawing/2014/main" id="{2BAD6B32-53C1-5ECE-DF6F-BFAC0BFA6248}"/>
+            </a:ext>
+          </a:extLst>
+        </p:cNvPr>
+        <p:cNvGrpSpPr/>
+        <p:nvPr/>
+      </p:nvGrpSpPr>
+      <p:grpSpPr>
+        <a:xfrm>
+          <a:off x="0" y="0"/>
+          <a:ext cx="0" cy="0"/>
+          <a:chOff x="0" y="0"/>
+          <a:chExt cx="0" cy="0"/>
+        </a:xfrm>
+      </p:grpSpPr>
+      <p:pic>
+        <p:nvPicPr>
+          <p:cNvPr id="4" name="Picture 3">
+            <a:extLst>
+              <a:ext uri="{FF2B5EF4-FFF2-40B4-BE49-F238E27FC236}">
+                <a16:creationId xmlns:a16="http://schemas.microsoft.com/office/drawing/2014/main" id="{25CCE976-9FE5-0B92-ADE9-1E6A97766F4E}"/>
+              </a:ext>
+            </a:extLst>
+          </p:cNvPr>
+          <p:cNvPicPr>
+            <a:picLocks noChangeAspect="1"/>
+          </p:cNvPicPr>
+          <p:nvPr/>
+        </p:nvPicPr>
+        <p:blipFill>
+          <a:blip r:embed="rId2"/>
+          <a:stretch>
+            <a:fillRect/>
+          </a:stretch>
+        </p:blipFill>
+        <p:spPr>
+          <a:xfrm>
+            <a:off x="0" y="0"/>
+            <a:ext cx="12192000" cy="1812229"/>
+          </a:xfrm>
+          <a:prstGeom prst="rect">
+            <a:avLst/>
+          </a:prstGeom>
+          <a:ln w="38100" cap="sq">
+            <a:solidFill>
+              <a:srgbClr val="000000"/>
+            </a:solidFill>
+            <a:prstDash val="solid"/>
+            <a:miter lim="800000"/>
+          </a:ln>
+          <a:effectLst>
+            <a:outerShdw blurRad="50800" dist="38100" dir="2700000" algn="tl" rotWithShape="0">
+              <a:srgbClr val="000000">
+                <a:alpha val="43000"/>
+              </a:srgbClr>
+            </a:outerShdw>
+          </a:effectLst>
+        </p:spPr>
+      </p:pic>
+      <p:pic>
+        <p:nvPicPr>
+          <p:cNvPr id="6" name="Picture 5">
+            <a:extLst>
+              <a:ext uri="{FF2B5EF4-FFF2-40B4-BE49-F238E27FC236}">
+                <a16:creationId xmlns:a16="http://schemas.microsoft.com/office/drawing/2014/main" id="{67E2F2BA-F2F0-79BB-752E-384CA1DC9F90}"/>
+              </a:ext>
+            </a:extLst>
+          </p:cNvPr>
+          <p:cNvPicPr>
+            <a:picLocks noChangeAspect="1"/>
+          </p:cNvPicPr>
+          <p:nvPr/>
+        </p:nvPicPr>
+        <p:blipFill>
+          <a:blip r:embed="rId3"/>
+          <a:stretch>
+            <a:fillRect/>
+          </a:stretch>
+        </p:blipFill>
+        <p:spPr>
+          <a:xfrm>
+            <a:off x="3094181" y="2530038"/>
+            <a:ext cx="9097818" cy="4327962"/>
+          </a:xfrm>
+          <a:prstGeom prst="rect">
+            <a:avLst/>
+          </a:prstGeom>
+          <a:ln w="38100" cap="sq">
+            <a:solidFill>
+              <a:srgbClr val="000000"/>
+            </a:solidFill>
+            <a:prstDash val="solid"/>
+            <a:miter lim="800000"/>
+          </a:ln>
+          <a:effectLst>
+            <a:outerShdw blurRad="50800" dist="38100" dir="2700000" algn="tl" rotWithShape="0">
+              <a:srgbClr val="000000">
+                <a:alpha val="43000"/>
+              </a:srgbClr>
+            </a:outerShdw>
+          </a:effectLst>
+        </p:spPr>
+      </p:pic>
+      <p:sp>
+        <p:nvSpPr>
+          <p:cNvPr id="7" name="TextBox 6">
+            <a:extLst>
+              <a:ext uri="{FF2B5EF4-FFF2-40B4-BE49-F238E27FC236}">
+                <a16:creationId xmlns:a16="http://schemas.microsoft.com/office/drawing/2014/main" id="{E226A74C-1376-C14F-D49E-C12F93D76C6F}"/>
+              </a:ext>
+            </a:extLst>
+          </p:cNvPr>
+          <p:cNvSpPr txBox="1"/>
+          <p:nvPr/>
+        </p:nvSpPr>
+        <p:spPr>
+          <a:xfrm>
+            <a:off x="88405" y="2915118"/>
+            <a:ext cx="2802577" cy="1230593"/>
+          </a:xfrm>
+          <a:prstGeom prst="rect">
+            <a:avLst/>
+          </a:prstGeom>
+          <a:noFill/>
+        </p:spPr>
+        <p:txBody>
+          <a:bodyPr wrap="square">
+            <a:spAutoFit/>
+          </a:bodyPr>
+          <a:lstStyle/>
+          <a:p>
+            <a:pPr>
+              <a:lnSpc>
+                <a:spcPct val="200000"/>
+              </a:lnSpc>
+              <a:buNone/>
+            </a:pPr>
+            <a:r>
+              <a:rPr lang="az-Latn-AZ" altLang="en-US" sz="1300">
+                <a:latin typeface="Arial" panose="020B0604020202020204" pitchFamily="34" charset="0"/>
+              </a:rPr>
+              <a:t>Sistemə </a:t>
+            </a:r>
+            <a:r>
+              <a:rPr lang="az-Latn-AZ" altLang="en-US" sz="1300" b="1">
+                <a:latin typeface="Arial" panose="020B0604020202020204" pitchFamily="34" charset="0"/>
+              </a:rPr>
+              <a:t>TEST</a:t>
+            </a:r>
+            <a:r>
+              <a:rPr lang="az-Latn-AZ" altLang="en-US" sz="1300">
+                <a:latin typeface="Arial" panose="020B0604020202020204" pitchFamily="34" charset="0"/>
+              </a:rPr>
+              <a:t> ilə giriş edirik və </a:t>
+            </a:r>
+            <a:r>
+              <a:rPr lang="az-Latn-AZ" altLang="en-US" sz="1300" b="1">
+                <a:latin typeface="Arial" panose="020B0604020202020204" pitchFamily="34" charset="0"/>
+              </a:rPr>
+              <a:t>DELETE</a:t>
+            </a:r>
+            <a:r>
+              <a:rPr lang="az-Latn-AZ" altLang="en-US" sz="1300">
+                <a:latin typeface="Arial" panose="020B0604020202020204" pitchFamily="34" charset="0"/>
+              </a:rPr>
+              <a:t> düyməsini görmüyəcəyik</a:t>
+            </a:r>
+            <a:r>
+              <a:rPr lang="en-US" altLang="en-US" sz="1300">
+                <a:latin typeface="Arial" panose="020B0604020202020204" pitchFamily="34" charset="0"/>
+              </a:rPr>
+              <a:t>, </a:t>
+            </a:r>
+            <a:r>
+              <a:rPr lang="en-US" altLang="en-US" sz="1300" b="1">
+                <a:latin typeface="Arial" panose="020B0604020202020204" pitchFamily="34" charset="0"/>
+              </a:rPr>
+              <a:t>UPDATE</a:t>
+            </a:r>
+            <a:r>
+              <a:rPr lang="en-US" altLang="en-US" sz="1300">
+                <a:latin typeface="Arial" panose="020B0604020202020204" pitchFamily="34" charset="0"/>
+              </a:rPr>
+              <a:t> </a:t>
+            </a:r>
+            <a:r>
+              <a:rPr lang="az-Latn-AZ" altLang="en-US" sz="1300">
+                <a:latin typeface="Arial" panose="020B0604020202020204" pitchFamily="34" charset="0"/>
+              </a:rPr>
+              <a:t>ilə </a:t>
+            </a:r>
+            <a:r>
+              <a:rPr lang="az-Latn-AZ" altLang="en-US" sz="1300" b="1">
+                <a:latin typeface="Arial" panose="020B0604020202020204" pitchFamily="34" charset="0"/>
+              </a:rPr>
+              <a:t>CREATE</a:t>
+            </a:r>
+            <a:r>
+              <a:rPr lang="az-Latn-AZ" altLang="en-US" sz="1300">
+                <a:latin typeface="Arial" panose="020B0604020202020204" pitchFamily="34" charset="0"/>
+              </a:rPr>
+              <a:t> -i görəcəyik.</a:t>
+            </a:r>
+            <a:endParaRPr kumimoji="0" lang="en-US" altLang="en-US" sz="1300" b="0" i="0" u="none" strike="noStrike" cap="none" normalizeH="0" baseline="0">
+              <a:ln>
+                <a:noFill/>
+              </a:ln>
+              <a:solidFill>
+                <a:schemeClr val="tx1"/>
+              </a:solidFill>
+              <a:effectLst/>
+              <a:latin typeface="Arial" panose="020B0604020202020204" pitchFamily="34" charset="0"/>
+            </a:endParaRPr>
+          </a:p>
+        </p:txBody>
+      </p:sp>
+    </p:spTree>
+    <p:extLst>
+      <p:ext uri="{BB962C8B-B14F-4D97-AF65-F5344CB8AC3E}">
+        <p14:creationId xmlns:p14="http://schemas.microsoft.com/office/powerpoint/2010/main" val="1527122028"/>
+      </p:ext>
+    </p:extLst>
+  </p:cSld>
+  <p:clrMapOvr>
+    <a:masterClrMapping/>
+  </p:clrMapOvr>
+</p:sld>
+</file>
+
+<file path=ppt/slides/slide8.xml><?xml version="1.0" encoding="utf-8"?>
+<p:sld xmlns:a="http://schemas.openxmlformats.org/drawingml/2006/main" xmlns:r="http://schemas.openxmlformats.org/officeDocument/2006/relationships" xmlns:p="http://schemas.openxmlformats.org/presentationml/2006/main">
+  <p:cSld>
+    <p:spTree>
+      <p:nvGrpSpPr>
+        <p:cNvPr id="1" name="">
+          <a:extLst>
+            <a:ext uri="{FF2B5EF4-FFF2-40B4-BE49-F238E27FC236}">
+              <a16:creationId xmlns:a16="http://schemas.microsoft.com/office/drawing/2014/main" id="{33C107C5-EF8D-CAA7-13D4-CD893B7E5E0E}"/>
+            </a:ext>
+          </a:extLst>
+        </p:cNvPr>
+        <p:cNvGrpSpPr/>
+        <p:nvPr/>
+      </p:nvGrpSpPr>
+      <p:grpSpPr>
+        <a:xfrm>
+          <a:off x="0" y="0"/>
+          <a:ext cx="0" cy="0"/>
+          <a:chOff x="0" y="0"/>
+          <a:chExt cx="0" cy="0"/>
+        </a:xfrm>
+      </p:grpSpPr>
+      <p:sp>
+        <p:nvSpPr>
+          <p:cNvPr id="3" name="TextBox 2">
+            <a:extLst>
+              <a:ext uri="{FF2B5EF4-FFF2-40B4-BE49-F238E27FC236}">
+                <a16:creationId xmlns:a16="http://schemas.microsoft.com/office/drawing/2014/main" id="{80C4DF8D-DA0C-2DA9-B13A-F4AFCBF73134}"/>
+              </a:ext>
+            </a:extLst>
+          </p:cNvPr>
+          <p:cNvSpPr txBox="1"/>
+          <p:nvPr/>
+        </p:nvSpPr>
+        <p:spPr>
+          <a:xfrm>
+            <a:off x="217714" y="255046"/>
+            <a:ext cx="11756571" cy="355354"/>
+          </a:xfrm>
+          <a:prstGeom prst="rect">
+            <a:avLst/>
+          </a:prstGeom>
+          <a:noFill/>
+        </p:spPr>
+        <p:txBody>
+          <a:bodyPr wrap="square">
+            <a:spAutoFit/>
+          </a:bodyPr>
+          <a:lstStyle/>
+          <a:p>
+            <a:pPr>
+              <a:lnSpc>
+                <a:spcPct val="150000"/>
+              </a:lnSpc>
+              <a:buNone/>
+            </a:pPr>
+            <a:r>
               <a:rPr kumimoji="0" lang="en-US" altLang="en-US" sz="1300" b="0" i="0" u="none" strike="noStrike" cap="none" normalizeH="0" baseline="0">
                 <a:ln>
                   <a:noFill/>
@@ -3559,7 +5206,93 @@
     </p:spTree>
     <p:extLst>
       <p:ext uri="{BB962C8B-B14F-4D97-AF65-F5344CB8AC3E}">
-        <p14:creationId xmlns:p14="http://schemas.microsoft.com/office/powerpoint/2010/main" val="3095838342"/>
+        <p14:creationId xmlns:p14="http://schemas.microsoft.com/office/powerpoint/2010/main" val="157058321"/>
+      </p:ext>
+    </p:extLst>
+  </p:cSld>
+  <p:clrMapOvr>
+    <a:masterClrMapping/>
+  </p:clrMapOvr>
+</p:sld>
+</file>
+
+<file path=ppt/slides/slide9.xml><?xml version="1.0" encoding="utf-8"?>
+<p:sld xmlns:a="http://schemas.openxmlformats.org/drawingml/2006/main" xmlns:r="http://schemas.openxmlformats.org/officeDocument/2006/relationships" xmlns:p="http://schemas.openxmlformats.org/presentationml/2006/main">
+  <p:cSld>
+    <p:spTree>
+      <p:nvGrpSpPr>
+        <p:cNvPr id="1" name="">
+          <a:extLst>
+            <a:ext uri="{FF2B5EF4-FFF2-40B4-BE49-F238E27FC236}">
+              <a16:creationId xmlns:a16="http://schemas.microsoft.com/office/drawing/2014/main" id="{CC7567C1-5161-636D-7C2C-A742C35A9110}"/>
+            </a:ext>
+          </a:extLst>
+        </p:cNvPr>
+        <p:cNvGrpSpPr/>
+        <p:nvPr/>
+      </p:nvGrpSpPr>
+      <p:grpSpPr>
+        <a:xfrm>
+          <a:off x="0" y="0"/>
+          <a:ext cx="0" cy="0"/>
+          <a:chOff x="0" y="0"/>
+          <a:chExt cx="0" cy="0"/>
+        </a:xfrm>
+      </p:grpSpPr>
+      <p:sp>
+        <p:nvSpPr>
+          <p:cNvPr id="3" name="TextBox 2">
+            <a:extLst>
+              <a:ext uri="{FF2B5EF4-FFF2-40B4-BE49-F238E27FC236}">
+                <a16:creationId xmlns:a16="http://schemas.microsoft.com/office/drawing/2014/main" id="{602923A7-D6DE-DABF-1E45-D8EF2F488D33}"/>
+              </a:ext>
+            </a:extLst>
+          </p:cNvPr>
+          <p:cNvSpPr txBox="1"/>
+          <p:nvPr/>
+        </p:nvSpPr>
+        <p:spPr>
+          <a:xfrm>
+            <a:off x="217714" y="255046"/>
+            <a:ext cx="11756571" cy="355354"/>
+          </a:xfrm>
+          <a:prstGeom prst="rect">
+            <a:avLst/>
+          </a:prstGeom>
+          <a:noFill/>
+        </p:spPr>
+        <p:txBody>
+          <a:bodyPr wrap="square">
+            <a:spAutoFit/>
+          </a:bodyPr>
+          <a:lstStyle/>
+          <a:p>
+            <a:pPr>
+              <a:lnSpc>
+                <a:spcPct val="150000"/>
+              </a:lnSpc>
+              <a:buNone/>
+            </a:pPr>
+            <a:r>
+              <a:rPr kumimoji="0" lang="en-US" altLang="en-US" sz="1300" b="0" i="0" u="none" strike="noStrike" cap="none" normalizeH="0" baseline="0">
+                <a:ln>
+                  <a:noFill/>
+                </a:ln>
+                <a:solidFill>
+                  <a:schemeClr val="tx1"/>
+                </a:solidFill>
+                <a:effectLst/>
+                <a:latin typeface="Arial" panose="020B0604020202020204" pitchFamily="34" charset="0"/>
+              </a:rPr>
+              <a:t>.</a:t>
+            </a:r>
+          </a:p>
+        </p:txBody>
+      </p:sp>
+    </p:spTree>
+    <p:extLst>
+      <p:ext uri="{BB962C8B-B14F-4D97-AF65-F5344CB8AC3E}">
+        <p14:creationId xmlns:p14="http://schemas.microsoft.com/office/powerpoint/2010/main" val="3294795457"/>
       </p:ext>
     </p:extLst>
   </p:cSld>
